--- a/slides/Module_07_Observability.pptx
+++ b/slides/Module_07_Observability.pptx
@@ -6511,7 +6511,7 @@
                   <a:srgbClr val="1E2D3D"/>
                 </a:solidFill>
               </a:rPr>
-              <a:t>Real-time tracking of agent actions, decisions, and tool calls. Surface anomalies, unexpected behaviour, and performance drift before humans notice.</a:t>
+              <a:t>Real-time tracking of agent actions, decisions, and tool calls. Surface anomalies, unexpected behavior, and performance drift before humans notice.</a:t>
             </a:r>
             <a:endParaRPr lang="en-US" sz="1000" dirty="0"/>
           </a:p>
@@ -9079,7 +9079,7 @@
                   <a:srgbClr val="D4E4F0"/>
                 </a:solidFill>
               </a:rPr>
-              <a:t>Mean Time to Detect unsafe/unexpected behaviour</a:t>
+              <a:t>Mean Time to Detect unsafe/unexpected behavior</a:t>
             </a:r>
             <a:endParaRPr lang="en-US" sz="950" dirty="0"/>
           </a:p>
@@ -9151,7 +9151,7 @@
                   <a:srgbClr val="D4E4F0"/>
                 </a:solidFill>
               </a:rPr>
-              <a:t>Mean Time to Intervene once unsafe behaviour detected</a:t>
+              <a:t>Mean Time to Intervene once unsafe behavior detected</a:t>
             </a:r>
             <a:endParaRPr lang="en-US" sz="950" dirty="0"/>
           </a:p>
@@ -13282,7 +13282,7 @@
                   <a:srgbClr val="FFFFFF"/>
                 </a:solidFill>
               </a:rPr>
-              <a:t>Gartner: 40% of agentic AI projects will be cancelled by 2027 due to unclear business value and inadequate risk controls</a:t>
+              <a:t>Gartner: 40% of agentic AI projects will be canceled by 2027 due to unclear business value and inadequate risk controls</a:t>
             </a:r>
             <a:endParaRPr lang="en-US" sz="1400" dirty="0"/>
           </a:p>
@@ -13645,7 +13645,7 @@
                   <a:srgbClr val="D4E4F0"/>
                 </a:solidFill>
               </a:rPr>
-              <a:t>Token spend is engineering spend. Show per-request cost on every PR. Engineers who see the cost of their prompt design change their behaviour.</a:t>
+              <a:t>Token spend is engineering spend. Show per-request cost on every PR. Engineers who see the cost of their prompt design change their behavior.</a:t>
             </a:r>
             <a:endParaRPr lang="en-US" sz="1100" dirty="0"/>
           </a:p>
@@ -14008,7 +14008,7 @@
                   <a:srgbClr val="D4E4F0"/>
                 </a:solidFill>
               </a:rPr>
-              <a:t>44% of organisations rely on manual methods to monitor agent interactions. The path to full automation runs through full visibility first.</a:t>
+              <a:t>44% of organizations rely on manual methods to monitor agent interactions. The path to full automation runs through full visibility first.</a:t>
             </a:r>
             <a:endParaRPr lang="en-US" sz="1100" dirty="0"/>
           </a:p>
